--- a/docs/exports/Oct14_session3.pptx
+++ b/docs/exports/Oct14_session3.pptx
@@ -43,6 +43,7 @@
     <p:sldId id="291" r:id="rId43"/>
     <p:sldId id="292" r:id="rId44"/>
     <p:sldId id="293" r:id="rId45"/>
+    <p:sldId id="294" r:id="rId46"/>
   </p:sldIdLst>
   <p:sldSz cx="12192000" cy="6858000" type="screen4x3"/>
   <p:notesSz cx="6858000" cy="9144000"/>
@@ -1028,7 +1029,7 @@
           <a:lstStyle/>
           <a:p>
             <a:r>
-              <a:t>Paper (Oct14_session3_materials.docx): Hand out the AI prompt card (pack page 3, one per group).</a:t>
+              <a:t>About 5 minutes, as the bridge into the analyst’s answers. Only the randomised comparison survives all five. Every other method is as good as the assumption behind one slider, which is why the clinic keeps asking which assumption would flip the result. Ask the room which slider the GreenWaste evaluation is most exposed to; the next slides show what the data can and cannot say.</a:t>
             </a:r>
           </a:p>
           <a:p/>
@@ -1105,6 +1106,127 @@
 </file>
 
 <file path=ppt/notesSlides/notesSlide6.xml><?xml version="1.0" encoding="utf-8"?>
+<p:notes xmlns:a="http://schemas.openxmlformats.org/drawingml/2006/main" xmlns:p="http://schemas.openxmlformats.org/presentationml/2006/main" xmlns:r="http://schemas.openxmlformats.org/officeDocument/2006/relationships">
+  <p:cSld>
+    <p:spTree>
+      <p:nvGrpSpPr>
+        <p:cNvPr id="1" name=""/>
+        <p:cNvGrpSpPr/>
+        <p:nvPr/>
+      </p:nvGrpSpPr>
+      <p:grpSpPr>
+        <a:xfrm>
+          <a:off x="0" y="0"/>
+          <a:ext cx="0" cy="0"/>
+          <a:chOff x="0" y="0"/>
+          <a:chExt cx="0" cy="0"/>
+        </a:xfrm>
+      </p:grpSpPr>
+      <p:sp>
+        <p:nvSpPr>
+          <p:cNvPr id="2" name="Slide Image Placeholder 1"/>
+          <p:cNvSpPr>
+            <a:spLocks noGrp="1"/>
+          </p:cNvSpPr>
+          <p:nvPr>
+            <p:ph type="sldImg" idx="2"/>
+          </p:nvPr>
+        </p:nvSpPr>
+        <p:spPr/>
+      </p:sp>
+      <p:sp>
+        <p:nvSpPr>
+          <p:cNvPr id="3" name="Notes Placeholder 2"/>
+          <p:cNvSpPr>
+            <a:spLocks noGrp="1"/>
+          </p:cNvSpPr>
+          <p:nvPr>
+            <p:ph type="body" idx="3" sz="quarter"/>
+          </p:nvPr>
+        </p:nvSpPr>
+        <p:spPr/>
+        <p:txBody>
+          <a:bodyPr/>
+          <a:lstStyle/>
+          <a:p>
+            <a:r>
+              <a:t>Paper (Oct14_session3_materials.docx): Hand out the AI prompt card (pack page 3, one per group).</a:t>
+            </a:r>
+          </a:p>
+          <a:p/>
+          <a:p>
+            <a:r>
+              <a:t>span.MJX_Assistive_MathML {</a:t>
+            </a:r>
+          </a:p>
+          <a:p>
+            <a:r>
+              <a:t>position:absolute!important;</a:t>
+            </a:r>
+          </a:p>
+          <a:p>
+            <a:r>
+              <a:t>clip: rect(1px, 1px, 1px, 1px);</a:t>
+            </a:r>
+          </a:p>
+          <a:p>
+            <a:r>
+              <a:t>padding: 1px 0 0 0!important;</a:t>
+            </a:r>
+          </a:p>
+          <a:p>
+            <a:r>
+              <a:t>border: 0!important;</a:t>
+            </a:r>
+          </a:p>
+          <a:p>
+            <a:r>
+              <a:t>height: 1px!important;</a:t>
+            </a:r>
+          </a:p>
+          <a:p>
+            <a:r>
+              <a:t>width: 1px!important;</a:t>
+            </a:r>
+          </a:p>
+          <a:p>
+            <a:r>
+              <a:t>overflow: hidden!important;</a:t>
+            </a:r>
+          </a:p>
+          <a:p>
+            <a:r>
+              <a:t>display:block!important;</a:t>
+            </a:r>
+          </a:p>
+          <a:p>
+            <a:r>
+              <a:t>}</a:t>
+            </a:r>
+          </a:p>
+        </p:txBody>
+      </p:sp>
+      <p:sp>
+        <p:nvSpPr>
+          <p:cNvPr id="4" name="Slide Number Placeholder 3"/>
+          <p:cNvSpPr>
+            <a:spLocks noGrp="1"/>
+          </p:cNvSpPr>
+          <p:nvPr>
+            <p:ph type="sldNum" idx="5" sz="quarter"/>
+          </p:nvPr>
+        </p:nvSpPr>
+        <p:spPr/>
+      </p:sp>
+    </p:spTree>
+  </p:cSld>
+  <p:clrMapOvr>
+    <a:masterClrMapping/>
+  </p:clrMapOvr>
+</p:notes>
+</file>
+
+<file path=ppt/notesSlides/notesSlide7.xml><?xml version="1.0" encoding="utf-8"?>
 <p:notes xmlns:a="http://schemas.openxmlformats.org/drawingml/2006/main" xmlns:p="http://schemas.openxmlformats.org/presentationml/2006/main" xmlns:r="http://schemas.openxmlformats.org/officeDocument/2006/relationships">
   <p:cSld>
     <p:spTree>
@@ -5511,6 +5633,48 @@
       <p:pic>
         <p:nvPicPr>
           <p:cNvPr id="2" name="Picture 1" descr="s038.jpg"/>
+          <p:cNvPicPr>
+            <a:picLocks noChangeAspect="1"/>
+          </p:cNvPicPr>
+          <p:nvPr/>
+        </p:nvPicPr>
+        <p:blipFill>
+          <a:blip r:embed="rId2"/>
+          <a:stretch>
+            <a:fillRect/>
+          </a:stretch>
+        </p:blipFill>
+        <p:spPr>
+          <a:xfrm>
+            <a:off x="0" y="0"/>
+            <a:ext cx="12192000" cy="6858000"/>
+          </a:xfrm>
+          <a:prstGeom prst="rect">
+            <a:avLst/>
+          </a:prstGeom>
+        </p:spPr>
+      </p:pic>
+    </p:spTree>
+  </p:cSld>
+  <p:clrMapOvr>
+    <a:masterClrMapping/>
+  </p:clrMapOvr>
+</p:sld>
+</file>
+
+<file path=ppt/slides/slide39.xml><?xml version="1.0" encoding="utf-8"?>
+<p:sld xmlns:a="http://schemas.openxmlformats.org/drawingml/2006/main" xmlns:p="http://schemas.openxmlformats.org/presentationml/2006/main" xmlns:r="http://schemas.openxmlformats.org/officeDocument/2006/relationships">
+  <p:cSld>
+    <p:spTree>
+      <p:nvGrpSpPr>
+        <p:cNvPr id="1" name=""/>
+        <p:cNvGrpSpPr/>
+        <p:nvPr/>
+      </p:nvGrpSpPr>
+      <p:grpSpPr/>
+      <p:pic>
+        <p:nvPicPr>
+          <p:cNvPr id="2" name="Picture 1" descr="s039.jpg"/>
           <p:cNvPicPr>
             <a:picLocks noChangeAspect="1"/>
           </p:cNvPicPr>
